--- a/Presentation.pptx
+++ b/Presentation.pptx
@@ -4353,7 +4353,7 @@
             </a:pPr>
             <a:r>
               <a:rPr/>
-              <a:t>Demo: [Vercel URL] Thank you.</a:t>
+              <a:t>Demo: https://.vercel.app Thank you.</a:t>
             </a:r>
           </a:p>
         </p:txBody>
@@ -4487,7 +4487,7 @@
             </a:pPr>
             <a:r>
               <a:rPr/>
-              <a:t>Live demo: [Vercel URL]</a:t>
+              <a:t>Live demo: https://.vercel.app</a:t>
             </a:r>
           </a:p>
         </p:txBody>
